--- a/deck/DeepVue-Embed-POC.pptx
+++ b/deck/DeepVue-Embed-POC.pptx
@@ -863,7 +863,7 @@
           <a:p>
             <a:r>
               <a:rPr lang="en-US" dirty="0"/>
-              <a:t>The point is not that something failed. The point is that the POC told us which method to build, before Phase 2 was estimated.</a:t>
+              <a:t>The point is not that something failed. Two things were learned: typed HTML is always stripped, and the portal will still embed us if we let its own pipeline do it. Inline display or measurement — on DubaiSel you pick one. The direct link stays the method to build on.</a:t>
             </a:r>
             <a:endParaRPr lang="en-US" dirty="0"/>
           </a:p>
@@ -3904,7 +3904,7 @@
                 <a:ea typeface="Cambria" pitchFamily="34" charset="-122"/>
                 <a:cs typeface="Cambria" pitchFamily="34" charset="-120"/>
               </a:rPr>
-              <a:t>The iframe never survives a description field</a:t>
+              <a:t>Pasted iframe HTML never survives</a:t>
             </a:r>
             <a:endParaRPr lang="en-US" sz="3200" dirty="0"/>
           </a:p>
@@ -3943,7 +3943,7 @@
                 <a:ea typeface="Calibri" pitchFamily="34" charset="-122"/>
                 <a:cs typeface="Calibri" pitchFamily="34" charset="-120"/>
               </a:rPr>
-              <a:t>Six attempts, three platforms, zero successes:</a:t>
+              <a:t>Nothing we typed was accepted — five attempts, zero successes:</a:t>
             </a:r>
             <a:endParaRPr lang="en-US" sz="1400" dirty="0"/>
           </a:p>
@@ -4749,7 +4749,7 @@
                 <a:ea typeface="Calibri" pitchFamily="34" charset="-122"/>
                 <a:cs typeface="Calibri" pitchFamily="34" charset="-120"/>
               </a:rPr>
-              <a:t>DubaiSel — oEmbed</a:t>
+              <a:t>vivaUAE — description</a:t>
             </a:r>
             <a:endParaRPr lang="en-US" sz="1200" dirty="0"/>
           </a:p>
@@ -4788,7 +4788,7 @@
                 <a:ea typeface="Calibri" pitchFamily="34" charset="-122"/>
                 <a:cs typeface="Calibri" pitchFamily="34" charset="-120"/>
               </a:rPr>
-              <a:t>Not picked up</a:t>
+              <a:t>Silently stripped</a:t>
             </a:r>
             <a:endParaRPr lang="en-US" sz="1150" dirty="0"/>
           </a:p>
@@ -4797,175 +4797,6 @@
       <p:sp>
         <p:nvSpPr>
           <p:cNvPr id="30" name="Shape 28"/>
-          <p:cNvSpPr/>
-          <p:nvPr/>
-        </p:nvSpPr>
-        <p:spPr>
-          <a:xfrm>
-            <a:off x="640080" y="5285232"/>
-            <a:ext cx="5760720" cy="548640"/>
-          </a:xfrm>
-          <a:prstGeom prst="roundRect">
-            <a:avLst>
-              <a:gd name="adj" fmla="val 13333"/>
-            </a:avLst>
-          </a:prstGeom>
-          <a:solidFill>
-            <a:srgbClr val="FEF3F2"/>
-          </a:solidFill>
-          <a:ln w="12700">
-            <a:solidFill>
-              <a:srgbClr val="FBD5D2"/>
-            </a:solidFill>
-            <a:prstDash val="solid"/>
-          </a:ln>
-        </p:spPr>
-      </p:sp>
-      <p:sp>
-        <p:nvSpPr>
-          <p:cNvPr id="31" name="Shape 29"/>
-          <p:cNvSpPr/>
-          <p:nvPr/>
-        </p:nvSpPr>
-        <p:spPr>
-          <a:xfrm>
-            <a:off x="841248" y="5385816"/>
-            <a:ext cx="329184" cy="329184"/>
-          </a:xfrm>
-          <a:prstGeom prst="ellipse">
-            <a:avLst/>
-          </a:prstGeom>
-          <a:solidFill>
-            <a:srgbClr val="B42318"/>
-          </a:solidFill>
-          <a:ln w="12700">
-            <a:solidFill>
-              <a:srgbClr val="B42318"/>
-            </a:solidFill>
-            <a:prstDash val="solid"/>
-          </a:ln>
-        </p:spPr>
-      </p:sp>
-      <p:sp>
-        <p:nvSpPr>
-          <p:cNvPr id="32" name="Text 30"/>
-          <p:cNvSpPr txBox="1"/>
-          <p:nvPr/>
-        </p:nvSpPr>
-        <p:spPr>
-          <a:xfrm>
-            <a:off x="841248" y="5385816"/>
-            <a:ext cx="329184" cy="329184"/>
-          </a:xfrm>
-          <a:prstGeom prst="rect">
-            <a:avLst/>
-          </a:prstGeom>
-          <a:noFill/>
-          <a:ln/>
-        </p:spPr>
-        <p:txBody>
-          <a:bodyPr wrap="square" lIns="0" tIns="0" rIns="0" bIns="0" rtlCol="0" anchor="ctr"/>
-          <a:lstStyle/>
-          <a:p>
-            <a:pPr algn="ctr" indent="0" marL="0">
-              <a:buNone/>
-            </a:pPr>
-            <a:r>
-              <a:rPr lang="en-US" sz="1500" b="1" dirty="0">
-                <a:solidFill>
-                  <a:srgbClr val="FFFFFF"/>
-                </a:solidFill>
-                <a:latin typeface="Calibri" pitchFamily="34" charset="0"/>
-                <a:ea typeface="Calibri" pitchFamily="34" charset="-122"/>
-                <a:cs typeface="Calibri" pitchFamily="34" charset="-120"/>
-              </a:rPr>
-              <a:t>✕</a:t>
-            </a:r>
-            <a:endParaRPr lang="en-US" sz="1500" dirty="0"/>
-          </a:p>
-        </p:txBody>
-      </p:sp>
-      <p:sp>
-        <p:nvSpPr>
-          <p:cNvPr id="33" name="Text 31"/>
-          <p:cNvSpPr txBox="1"/>
-          <p:nvPr/>
-        </p:nvSpPr>
-        <p:spPr>
-          <a:xfrm>
-            <a:off x="1298448" y="5340096"/>
-            <a:ext cx="2606040" cy="438912"/>
-          </a:xfrm>
-          <a:prstGeom prst="rect">
-            <a:avLst/>
-          </a:prstGeom>
-          <a:noFill/>
-          <a:ln/>
-        </p:spPr>
-        <p:txBody>
-          <a:bodyPr wrap="square" lIns="0" tIns="0" rIns="0" bIns="0" rtlCol="0" anchor="ctr"/>
-          <a:lstStyle/>
-          <a:p>
-            <a:pPr indent="0" marL="0">
-              <a:buNone/>
-            </a:pPr>
-            <a:r>
-              <a:rPr lang="en-US" sz="1200" b="1" dirty="0">
-                <a:solidFill>
-                  <a:srgbClr val="0E1726"/>
-                </a:solidFill>
-                <a:latin typeface="Calibri" pitchFamily="34" charset="0"/>
-                <a:ea typeface="Calibri" pitchFamily="34" charset="-122"/>
-                <a:cs typeface="Calibri" pitchFamily="34" charset="-120"/>
-              </a:rPr>
-              <a:t>vivaUAE — description</a:t>
-            </a:r>
-            <a:endParaRPr lang="en-US" sz="1200" dirty="0"/>
-          </a:p>
-        </p:txBody>
-      </p:sp>
-      <p:sp>
-        <p:nvSpPr>
-          <p:cNvPr id="34" name="Text 32"/>
-          <p:cNvSpPr txBox="1"/>
-          <p:nvPr/>
-        </p:nvSpPr>
-        <p:spPr>
-          <a:xfrm>
-            <a:off x="3886200" y="5340096"/>
-            <a:ext cx="2377440" cy="438912"/>
-          </a:xfrm>
-          <a:prstGeom prst="rect">
-            <a:avLst/>
-          </a:prstGeom>
-          <a:noFill/>
-          <a:ln/>
-        </p:spPr>
-        <p:txBody>
-          <a:bodyPr wrap="square" lIns="0" tIns="0" rIns="0" bIns="0" rtlCol="0" anchor="ctr"/>
-          <a:lstStyle/>
-          <a:p>
-            <a:pPr algn="r" indent="0" marL="0">
-              <a:buNone/>
-            </a:pPr>
-            <a:r>
-              <a:rPr lang="en-US" sz="1150" dirty="0">
-                <a:solidFill>
-                  <a:srgbClr val="475467"/>
-                </a:solidFill>
-                <a:latin typeface="Calibri" pitchFamily="34" charset="0"/>
-                <a:ea typeface="Calibri" pitchFamily="34" charset="-122"/>
-                <a:cs typeface="Calibri" pitchFamily="34" charset="-120"/>
-              </a:rPr>
-              <a:t>Silently stripped</a:t>
-            </a:r>
-            <a:endParaRPr lang="en-US" sz="1150" dirty="0"/>
-          </a:p>
-        </p:txBody>
-      </p:sp>
-      <p:sp>
-        <p:nvSpPr>
-          <p:cNvPr id="35" name="Shape 33"/>
           <p:cNvSpPr/>
           <p:nvPr/>
         </p:nvSpPr>
@@ -4992,7 +4823,7 @@
       </p:sp>
       <p:sp>
         <p:nvSpPr>
-          <p:cNvPr id="36" name="Text 34"/>
+          <p:cNvPr id="31" name="Text 29"/>
           <p:cNvSpPr txBox="1"/>
           <p:nvPr/>
         </p:nvSpPr>
@@ -5031,7 +4862,7 @@
       </p:sp>
       <p:sp>
         <p:nvSpPr>
-          <p:cNvPr id="37" name="Text 35"/>
+          <p:cNvPr id="32" name="Text 30"/>
           <p:cNvSpPr txBox="1"/>
           <p:nvPr/>
         </p:nvSpPr>
@@ -5070,7 +4901,7 @@
       </p:sp>
       <p:sp>
         <p:nvSpPr>
-          <p:cNvPr id="38" name="Shape 36"/>
+          <p:cNvPr id="33" name="Shape 31"/>
           <p:cNvSpPr/>
           <p:nvPr/>
         </p:nvSpPr>
@@ -5097,7 +4928,7 @@
       </p:sp>
       <p:sp>
         <p:nvSpPr>
-          <p:cNvPr id="39" name="Shape 37"/>
+          <p:cNvPr id="34" name="Shape 32"/>
           <p:cNvSpPr/>
           <p:nvPr/>
         </p:nvSpPr>
@@ -5122,7 +4953,7 @@
       </p:sp>
       <p:sp>
         <p:nvSpPr>
-          <p:cNvPr id="40" name="Text 38"/>
+          <p:cNvPr id="35" name="Text 33"/>
           <p:cNvSpPr txBox="1"/>
           <p:nvPr/>
         </p:nvSpPr>
@@ -5161,7 +4992,7 @@
       </p:sp>
       <p:sp>
         <p:nvSpPr>
-          <p:cNvPr id="41" name="Text 39"/>
+          <p:cNvPr id="36" name="Text 34"/>
           <p:cNvSpPr txBox="1"/>
           <p:nvPr/>
         </p:nvSpPr>
@@ -5192,7 +5023,7 @@
                 <a:ea typeface="Calibri" pitchFamily="34" charset="-122"/>
                 <a:cs typeface="Calibri" pitchFamily="34" charset="-120"/>
               </a:rPr>
-              <a:t>The direct link worked everywhere</a:t>
+              <a:t>But the portal can embed it itself</a:t>
             </a:r>
             <a:endParaRPr lang="en-US" sz="1400" dirty="0"/>
           </a:p>
@@ -5200,30 +5031,30 @@
       </p:sp>
       <p:sp>
         <p:nvSpPr>
-          <p:cNvPr id="42" name="Text 40"/>
+          <p:cNvPr id="37" name="Text 35"/>
           <p:cNvSpPr txBox="1"/>
           <p:nvPr/>
         </p:nvSpPr>
         <p:spPr>
           <a:xfrm>
             <a:off x="7178040" y="5029200"/>
-            <a:ext cx="4023360" cy="896112"/>
-          </a:xfrm>
-          <a:prstGeom prst="rect">
-            <a:avLst/>
-          </a:prstGeom>
-          <a:noFill/>
-          <a:ln/>
-        </p:spPr>
-        <p:txBody>
-          <a:bodyPr wrap="square" lIns="0" tIns="0" rIns="0" bIns="0" rtlCol="0" anchor="ctr"/>
-          <a:lstStyle/>
-          <a:p>
-            <a:pPr indent="0" marL="0">
-              <a:buNone/>
-            </a:pPr>
-            <a:r>
-              <a:rPr lang="en-US" sz="1250" dirty="0">
+            <a:ext cx="4023360" cy="914400"/>
+          </a:xfrm>
+          <a:prstGeom prst="rect">
+            <a:avLst/>
+          </a:prstGeom>
+          <a:noFill/>
+          <a:ln/>
+        </p:spPr>
+        <p:txBody>
+          <a:bodyPr wrap="square" lIns="0" tIns="0" rIns="0" bIns="0" rtlCol="0" anchor="ctr"/>
+          <a:lstStyle/>
+          <a:p>
+            <a:pPr indent="0" marL="0">
+              <a:buNone/>
+            </a:pPr>
+            <a:r>
+              <a:rPr lang="en-US" sz="1150" dirty="0">
                 <a:solidFill>
                   <a:srgbClr val="475467"/>
                 </a:solidFill>
@@ -5231,9 +5062,9 @@
                 <a:ea typeface="Calibri" pitchFamily="34" charset="-122"/>
                 <a:cs typeface="Calibri" pitchFamily="34" charset="-120"/>
               </a:rPr>
-              <a:t>So it becomes the primary method. Inline display stays available on a portal’s own tour field, or a page the agent controls.</a:t>
-            </a:r>
-            <a:endParaRPr lang="en-US" sz="1250" dirty="0"/>
+              <a:t>A bare URL in DubaiSel’s description made its WordPress fetch our oEmbed endpoint and build its own iframe. The tour renders inline on the live listing — but sandboxed, so it reports no analytics.</a:t>
+            </a:r>
+            <a:endParaRPr lang="en-US" sz="1150" dirty="0"/>
           </a:p>
         </p:txBody>
       </p:sp>
